--- a/Introduccion a la Ingenieria/Clases/Clase 9 - Estrategias de innovacion en Ingenieria/Presentacion.pptx
+++ b/Introduccion a la Ingenieria/Clases/Clase 9 - Estrategias de innovacion en Ingenieria/Presentacion.pptx
@@ -5896,7 +5896,7 @@
               </a:spcAft>
             </a:pPr>
             <a:r>
-              <a:rPr sz="1600" b="0" i="0">
+              <a:rPr sz="2000" b="0" i="0">
                 <a:solidFill>
                   <a:srgbClr val="333333"/>
                 </a:solidFill>
@@ -5905,7 +5905,7 @@
               <a:t>–   </a:t>
             </a:r>
             <a:r>
-              <a:rPr sz="1600" b="1" i="0">
+              <a:rPr sz="2000" b="1" i="0">
                 <a:solidFill>
                   <a:srgbClr val="333333"/>
                 </a:solidFill>
@@ -5914,7 +5914,7 @@
               <a:t>Trabajo dirigido:</a:t>
             </a:r>
             <a:r>
-              <a:rPr sz="1600" b="0" i="0">
+              <a:rPr sz="2000" b="0" i="0">
                 <a:solidFill>
                   <a:srgbClr val="333333"/>
                 </a:solidFill>
@@ -5923,7 +5923,7 @@
               <a:t> Revisión bibliográfica — completar las tres fichas con los seis campos y </a:t>
             </a:r>
             <a:r>
-              <a:rPr sz="1600" b="1" i="0">
+              <a:rPr sz="2000" b="1" i="0">
                 <a:solidFill>
                   <a:srgbClr val="333333"/>
                 </a:solidFill>
@@ -5932,7 +5932,7 @@
               <a:t>abrir cada enlace</a:t>
             </a:r>
             <a:r>
-              <a:rPr sz="1600" b="0" i="0">
+              <a:rPr sz="2000" b="0" i="0">
                 <a:solidFill>
                   <a:srgbClr val="333333"/>
                 </a:solidFill>
@@ -5948,7 +5948,7 @@
               </a:spcAft>
             </a:pPr>
             <a:r>
-              <a:rPr sz="1600" b="0" i="0">
+              <a:rPr sz="2000" b="0" i="0">
                 <a:solidFill>
                   <a:srgbClr val="333333"/>
                 </a:solidFill>
@@ -5957,7 +5957,7 @@
               <a:t>–   </a:t>
             </a:r>
             <a:r>
-              <a:rPr sz="1600" b="1" i="0">
+              <a:rPr sz="2000" b="1" i="0">
                 <a:solidFill>
                   <a:srgbClr val="333333"/>
                 </a:solidFill>
@@ -5966,7 +5966,7 @@
               <a:t>Trabajo independiente:</a:t>
             </a:r>
             <a:r>
-              <a:rPr sz="1600" b="0" i="0">
+              <a:rPr sz="2000" b="0" i="0">
                 <a:solidFill>
                   <a:srgbClr val="333333"/>
                 </a:solidFill>
@@ -5982,7 +5982,7 @@
               </a:spcAft>
             </a:pPr>
             <a:r>
-              <a:rPr sz="1600" b="0" i="0">
+              <a:rPr sz="2000" b="0" i="0">
                 <a:solidFill>
                   <a:srgbClr val="333333"/>
                 </a:solidFill>
@@ -5991,7 +5991,7 @@
               <a:t>–   </a:t>
             </a:r>
             <a:r>
-              <a:rPr sz="1600" b="1" i="0">
+              <a:rPr sz="2000" b="1" i="0">
                 <a:solidFill>
                   <a:srgbClr val="333333"/>
                 </a:solidFill>
@@ -6000,7 +6000,7 @@
               <a:t>Sesión 10 · Herramientas digitales aplicadas a la Ingeniería</a:t>
             </a:r>
             <a:r>
-              <a:rPr sz="1600" b="0" i="0">
+              <a:rPr sz="2000" b="0" i="0">
                 <a:solidFill>
                   <a:srgbClr val="333333"/>
                 </a:solidFill>
@@ -6009,7 +6009,7 @@
               <a:t> — </a:t>
             </a:r>
             <a:r>
-              <a:rPr sz="1600" b="1" i="0">
+              <a:rPr sz="2000" b="1" i="0">
                 <a:solidFill>
                   <a:srgbClr val="333333"/>
                 </a:solidFill>
@@ -6018,7 +6018,7 @@
               <a:t>prototipado</a:t>
             </a:r>
             <a:r>
-              <a:rPr sz="1600" b="0" i="0">
+              <a:rPr sz="2000" b="0" i="0">
                 <a:solidFill>
                   <a:srgbClr val="333333"/>
                 </a:solidFill>
@@ -6034,7 +6034,7 @@
               </a:spcAft>
             </a:pPr>
             <a:r>
-              <a:rPr sz="1600" b="0" i="0">
+              <a:rPr sz="2000" b="0" i="0">
                 <a:solidFill>
                   <a:srgbClr val="333333"/>
                 </a:solidFill>
@@ -6043,7 +6043,7 @@
               <a:t>–   </a:t>
             </a:r>
             <a:r>
-              <a:rPr sz="1600" b="1" i="0">
+              <a:rPr sz="2000" b="1" i="0">
                 <a:solidFill>
                   <a:srgbClr val="333333"/>
                 </a:solidFill>
@@ -6052,7 +6052,7 @@
               <a:t>Aviso:</a:t>
             </a:r>
             <a:r>
-              <a:rPr sz="1600" b="0" i="0">
+              <a:rPr sz="2000" b="0" i="0">
                 <a:solidFill>
                   <a:srgbClr val="333333"/>
                 </a:solidFill>
@@ -6061,7 +6061,7 @@
               <a:t> Para la sesión 10 traigan la propuesta de mejora escrita y el </a:t>
             </a:r>
             <a:r>
-              <a:rPr sz="1600" b="1" i="0">
+              <a:rPr sz="2000" b="1" i="0">
                 <a:solidFill>
                   <a:srgbClr val="333333"/>
                 </a:solidFill>
@@ -6070,7 +6070,7 @@
               <a:t>alcance mínimo de la sesión 8</a:t>
             </a:r>
             <a:r>
-              <a:rPr sz="1600" b="0" i="0">
+              <a:rPr sz="2000" b="0" i="0">
                 <a:solidFill>
                   <a:srgbClr val="333333"/>
                 </a:solidFill>
@@ -6086,7 +6086,7 @@
               </a:spcAft>
             </a:pPr>
             <a:r>
-              <a:rPr sz="1600" b="0" i="0">
+              <a:rPr sz="2000" b="0" i="0">
                 <a:solidFill>
                   <a:srgbClr val="333333"/>
                 </a:solidFill>
@@ -6095,7 +6095,7 @@
               <a:t>–   </a:t>
             </a:r>
             <a:r>
-              <a:rPr sz="1600" b="1" i="0">
+              <a:rPr sz="2000" b="1" i="0">
                 <a:solidFill>
                   <a:srgbClr val="333333"/>
                 </a:solidFill>
@@ -6104,7 +6104,7 @@
               <a:t>Antes de salir:</a:t>
             </a:r>
             <a:r>
-              <a:rPr sz="1600" b="0" i="0">
+              <a:rPr sz="2000" b="0" i="0">
                 <a:solidFill>
                   <a:srgbClr val="333333"/>
                 </a:solidFill>
@@ -6678,7 +6678,7 @@
         <p:spPr>
           <a:xfrm>
             <a:off x="502920" y="2798064"/>
-            <a:ext cx="2164019" cy="2560320"/>
+            <a:ext cx="2164019" cy="3099816"/>
           </a:xfrm>
           <a:prstGeom prst="rect">
             <a:avLst/>
@@ -6793,7 +6793,7 @@
         <p:spPr>
           <a:xfrm>
             <a:off x="2758379" y="2798064"/>
-            <a:ext cx="2164019" cy="2560320"/>
+            <a:ext cx="2164019" cy="3099816"/>
           </a:xfrm>
           <a:prstGeom prst="rect">
             <a:avLst/>
@@ -6908,7 +6908,7 @@
         <p:spPr>
           <a:xfrm>
             <a:off x="5013838" y="2798064"/>
-            <a:ext cx="2164019" cy="2560320"/>
+            <a:ext cx="2164019" cy="3099816"/>
           </a:xfrm>
           <a:prstGeom prst="rect">
             <a:avLst/>
@@ -7023,7 +7023,7 @@
         <p:spPr>
           <a:xfrm>
             <a:off x="7269297" y="2798064"/>
-            <a:ext cx="2164019" cy="2560320"/>
+            <a:ext cx="2164019" cy="3099816"/>
           </a:xfrm>
           <a:prstGeom prst="rect">
             <a:avLst/>
@@ -7138,7 +7138,7 @@
         <p:spPr>
           <a:xfrm>
             <a:off x="9524756" y="2798064"/>
-            <a:ext cx="2164019" cy="2560320"/>
+            <a:ext cx="2164019" cy="3099816"/>
           </a:xfrm>
           <a:prstGeom prst="rect">
             <a:avLst/>
@@ -7172,8 +7172,8 @@
         </p:nvSpPr>
         <p:spPr>
           <a:xfrm>
-            <a:off x="457200" y="5943600"/>
-            <a:ext cx="11277295" cy="365760"/>
+            <a:off x="457200" y="5806440"/>
+            <a:ext cx="11277295" cy="640080"/>
           </a:xfrm>
           <a:prstGeom prst="rect">
             <a:avLst/>
@@ -7426,7 +7426,7 @@
               </a:spcAft>
             </a:pPr>
             <a:r>
-              <a:rPr sz="1600" b="0" i="0">
+              <a:rPr sz="2000" b="0" i="0">
                 <a:solidFill>
                   <a:srgbClr val="333333"/>
                 </a:solidFill>
@@ -7435,7 +7435,7 @@
               <a:t>–   Distinguir </a:t>
             </a:r>
             <a:r>
-              <a:rPr sz="1600" b="1" i="0">
+              <a:rPr sz="2000" b="1" i="0">
                 <a:solidFill>
                   <a:srgbClr val="333333"/>
                 </a:solidFill>
@@ -7444,7 +7444,7 @@
               <a:t>innovación</a:t>
             </a:r>
             <a:r>
-              <a:rPr sz="1600" b="0" i="0">
+              <a:rPr sz="2000" b="0" i="0">
                 <a:solidFill>
                   <a:srgbClr val="333333"/>
                 </a:solidFill>
@@ -7460,7 +7460,7 @@
               </a:spcAft>
             </a:pPr>
             <a:r>
-              <a:rPr sz="1600" b="0" i="0">
+              <a:rPr sz="2000" b="0" i="0">
                 <a:solidFill>
                   <a:srgbClr val="333333"/>
                 </a:solidFill>
@@ -7469,7 +7469,7 @@
               <a:t>–   Aplicar </a:t>
             </a:r>
             <a:r>
-              <a:rPr sz="1600" b="1" i="0">
+              <a:rPr sz="2000" b="1" i="0">
                 <a:solidFill>
                   <a:srgbClr val="333333"/>
                 </a:solidFill>
@@ -7478,7 +7478,7 @@
               <a:t>cuatro maneras concretas</a:t>
             </a:r>
             <a:r>
-              <a:rPr sz="1600" b="0" i="0">
+              <a:rPr sz="2000" b="0" i="0">
                 <a:solidFill>
                   <a:srgbClr val="333333"/>
                 </a:solidFill>
@@ -7494,7 +7494,7 @@
               </a:spcAft>
             </a:pPr>
             <a:r>
-              <a:rPr sz="1600" b="0" i="0">
+              <a:rPr sz="2000" b="0" i="0">
                 <a:solidFill>
                   <a:srgbClr val="333333"/>
                 </a:solidFill>
@@ -7503,7 +7503,7 @@
               <a:t>–   Buscar antecedentes con una </a:t>
             </a:r>
             <a:r>
-              <a:rPr sz="1600" b="1" i="0">
+              <a:rPr sz="2000" b="1" i="0">
                 <a:solidFill>
                   <a:srgbClr val="333333"/>
                 </a:solidFill>
@@ -7512,7 +7512,7 @@
               <a:t>pregunta de búsqueda</a:t>
             </a:r>
             <a:r>
-              <a:rPr sz="1600" b="0" i="0">
+              <a:rPr sz="2000" b="0" i="0">
                 <a:solidFill>
                   <a:srgbClr val="333333"/>
                 </a:solidFill>
@@ -7521,7 +7521,7 @@
               <a:t> y </a:t>
             </a:r>
             <a:r>
-              <a:rPr sz="1600" b="1" i="0">
+              <a:rPr sz="2000" b="1" i="0">
                 <a:solidFill>
                   <a:srgbClr val="333333"/>
                 </a:solidFill>
@@ -7530,7 +7530,7 @@
               <a:t>evaluar la calidad de una fuente</a:t>
             </a:r>
             <a:r>
-              <a:rPr sz="1600" b="0" i="0">
+              <a:rPr sz="2000" b="0" i="0">
                 <a:solidFill>
                   <a:srgbClr val="333333"/>
                 </a:solidFill>
@@ -7546,7 +7546,7 @@
               </a:spcAft>
             </a:pPr>
             <a:r>
-              <a:rPr sz="1600" b="0" i="0">
+              <a:rPr sz="2000" b="0" i="0">
                 <a:solidFill>
                   <a:srgbClr val="333333"/>
                 </a:solidFill>
@@ -7555,7 +7555,7 @@
               <a:t>–   Fichar tres antecedentes verificables y escribir </a:t>
             </a:r>
             <a:r>
-              <a:rPr sz="1600" b="1" i="0">
+              <a:rPr sz="2000" b="1" i="0">
                 <a:solidFill>
                   <a:srgbClr val="333333"/>
                 </a:solidFill>
@@ -7564,7 +7564,7 @@
               <a:t>qué van a hacer distinto y por qué</a:t>
             </a:r>
             <a:r>
-              <a:rPr sz="1600" b="0" i="0">
+              <a:rPr sz="2000" b="0" i="0">
                 <a:solidFill>
                   <a:srgbClr val="333333"/>
                 </a:solidFill>

--- a/Introduccion a la Ingenieria/Clases/Clase 9 - Estrategias de innovacion en Ingenieria/Presentacion.pptx
+++ b/Introduccion a la Ingenieria/Clases/Clase 9 - Estrategias de innovacion en Ingenieria/Presentacion.pptx
@@ -5863,7 +5863,7 @@
                 </a:solidFill>
                 <a:latin typeface="Calibri"/>
               </a:rPr>
-              <a:t>Para la sesión 10</a:t>
+              <a:t>Para la Clase 10</a:t>
             </a:r>
           </a:p>
         </p:txBody>
@@ -5997,7 +5997,7 @@
                 </a:solidFill>
                 <a:latin typeface="Calibri"/>
               </a:rPr>
-              <a:t>Sesión 10 · Herramientas digitales aplicadas a la Ingeniería</a:t>
+              <a:t>Clase 10 · Herramientas digitales aplicadas a la Ingeniería</a:t>
             </a:r>
             <a:r>
               <a:rPr sz="2000" b="0" i="0">
